--- a/planering/biologi-omrade1/biologi-1-2-modeller-kallor-argument.pptx
+++ b/planering/biologi-omrade1/biologi-1-2-modeller-kallor-argument.pptx
@@ -128,12 +128,12 @@
   <p:extLst>
     <p:ext uri="{521415D9-36F7-43E2-AB2F-B90AF26B5E84}">
       <p14:sectionLst xmlns:p14="http://schemas.microsoft.com/office/powerpoint/2010/main">
-        <p14:section name="Start" id="{964ab8d7-a43e-a8d8-4139-a8828b8b4e35}">
+        <p14:section name="Start" id="{ed390f0b-dfc9-97a3-fa8a-9b7627335b29}">
           <p14:sldIdLst>
             <p14:sldId id="256"/>
           </p14:sldIdLst>
         </p14:section>
-        <p14:section name="1.2.1 Vad kan vetenskap pröva?" id="{885d61f2-a67f-9839-2008-dd3d46cea32b}">
+        <p14:section name="1.2.1 Vad kan vetenskap pröva?" id="{856f5c24-a688-321c-9c56-db5959c00332}">
           <p14:sldIdLst>
             <p14:sldId id="257"/>
             <p14:sldId id="258"/>
@@ -143,7 +143,7 @@
             <p14:sldId id="262"/>
           </p14:sldIdLst>
         </p14:section>
-        <p14:section name="1.2.2 När forskare ändrat sig" id="{a8ce58cf-8c9c-a316-58e4-121c82702408}">
+        <p14:section name="1.2.2 När forskare ändrat sig" id="{f001ca36-c405-c87f-7c2a-6f8b49555997}">
           <p14:sldIdLst>
             <p14:sldId id="263"/>
             <p14:sldId id="264"/>
@@ -153,7 +153,7 @@
             <p14:sldId id="268"/>
           </p14:sldIdLst>
         </p14:section>
-        <p14:section name="1.2.3 Söka information och bedöma källor" id="{9387880f-84bf-3d31-919c-c51ce9fca670}">
+        <p14:section name="1.2.3 Söka information och bedöma källor" id="{f428d000-be6d-9623-44ea-a0374616fb5c}">
           <p14:sldIdLst>
             <p14:sldId id="269"/>
             <p14:sldId id="270"/>
@@ -163,7 +163,7 @@
             <p14:sldId id="274"/>
           </p14:sldIdLst>
         </p14:section>
-        <p14:section name="Labb 1.2 Granska ett påstående" id="{e1bb4651-a9bb-f5e2-835c-ddd8acb3a35f}">
+        <p14:section name="Labb 1.2 Granska ett påstående" id="{b9c15dca-a4fd-6198-8b36-dbb08722fc8b}">
           <p14:sldIdLst>
             <p14:sldId id="275"/>
             <p14:sldId id="276"/>

--- a/planering/biologi-omrade1/biologi-1-2-modeller-kallor-argument.pptx
+++ b/planering/biologi-omrade1/biologi-1-2-modeller-kallor-argument.pptx
@@ -128,12 +128,12 @@
   <p:extLst>
     <p:ext uri="{521415D9-36F7-43E2-AB2F-B90AF26B5E84}">
       <p14:sectionLst xmlns:p14="http://schemas.microsoft.com/office/powerpoint/2010/main">
-        <p14:section name="Start" id="{ed390f0b-dfc9-97a3-fa8a-9b7627335b29}">
+        <p14:section name="Start" id="{a7f48e3a-1d7e-cf57-6a02-6f7a5dda75bb}">
           <p14:sldIdLst>
             <p14:sldId id="256"/>
           </p14:sldIdLst>
         </p14:section>
-        <p14:section name="1.2.1 Vad kan vetenskap pröva?" id="{856f5c24-a688-321c-9c56-db5959c00332}">
+        <p14:section name="1.2.1 Vad kan vetenskap pröva?" id="{732cf611-255d-248c-0d85-00f82e360661}">
           <p14:sldIdLst>
             <p14:sldId id="257"/>
             <p14:sldId id="258"/>
@@ -143,7 +143,7 @@
             <p14:sldId id="262"/>
           </p14:sldIdLst>
         </p14:section>
-        <p14:section name="1.2.2 När forskare ändrat sig" id="{f001ca36-c405-c87f-7c2a-6f8b49555997}">
+        <p14:section name="1.2.2 När forskare ändrat sig" id="{420b0499-1dbb-8f6e-ceb9-250f9594e6fe}">
           <p14:sldIdLst>
             <p14:sldId id="263"/>
             <p14:sldId id="264"/>
@@ -153,7 +153,7 @@
             <p14:sldId id="268"/>
           </p14:sldIdLst>
         </p14:section>
-        <p14:section name="1.2.3 Söka information och bedöma källor" id="{f428d000-be6d-9623-44ea-a0374616fb5c}">
+        <p14:section name="1.2.3 Söka information och bedöma källor" id="{73052389-df77-7a67-d9f9-c8ad386ee7c0}">
           <p14:sldIdLst>
             <p14:sldId id="269"/>
             <p14:sldId id="270"/>
@@ -163,7 +163,7 @@
             <p14:sldId id="274"/>
           </p14:sldIdLst>
         </p14:section>
-        <p14:section name="Labb 1.2 Granska ett påstående" id="{b9c15dca-a4fd-6198-8b36-dbb08722fc8b}">
+        <p14:section name="Labb 1.2 Granska ett påstående" id="{248e4e8a-b308-c741-9a44-fa07bb830ca0}">
           <p14:sldIdLst>
             <p14:sldId id="275"/>
             <p14:sldId id="276"/>

--- a/planering/biologi-omrade1/biologi-1-2-modeller-kallor-argument.pptx
+++ b/planering/biologi-omrade1/biologi-1-2-modeller-kallor-argument.pptx
@@ -128,12 +128,12 @@
   <p:extLst>
     <p:ext uri="{521415D9-36F7-43E2-AB2F-B90AF26B5E84}">
       <p14:sectionLst xmlns:p14="http://schemas.microsoft.com/office/powerpoint/2010/main">
-        <p14:section name="Start" id="{a7f48e3a-1d7e-cf57-6a02-6f7a5dda75bb}">
+        <p14:section name="Start" id="{6ee7b044-06f8-8fea-28aa-c2787d0c1af9}">
           <p14:sldIdLst>
             <p14:sldId id="256"/>
           </p14:sldIdLst>
         </p14:section>
-        <p14:section name="1.2.1 Vad kan vetenskap pröva?" id="{732cf611-255d-248c-0d85-00f82e360661}">
+        <p14:section name="Vad kan vetenskap pröva?" id="{3624544a-cbfe-3465-bfce-299514aa2ddc}">
           <p14:sldIdLst>
             <p14:sldId id="257"/>
             <p14:sldId id="258"/>
@@ -143,7 +143,7 @@
             <p14:sldId id="262"/>
           </p14:sldIdLst>
         </p14:section>
-        <p14:section name="1.2.2 När forskare ändrat sig" id="{420b0499-1dbb-8f6e-ceb9-250f9594e6fe}">
+        <p14:section name="När forskare ändrat sig" id="{2d558e4a-670c-fd57-290b-29b4b6845477}">
           <p14:sldIdLst>
             <p14:sldId id="263"/>
             <p14:sldId id="264"/>
@@ -153,7 +153,7 @@
             <p14:sldId id="268"/>
           </p14:sldIdLst>
         </p14:section>
-        <p14:section name="1.2.3 Söka information och bedöma källor" id="{73052389-df77-7a67-d9f9-c8ad386ee7c0}">
+        <p14:section name="Söka information och bedöma källor" id="{049a04fe-77ad-9ed9-a99f-643cef47dc18}">
           <p14:sldIdLst>
             <p14:sldId id="269"/>
             <p14:sldId id="270"/>
@@ -163,7 +163,7 @@
             <p14:sldId id="274"/>
           </p14:sldIdLst>
         </p14:section>
-        <p14:section name="Labb 1.2 Granska ett påstående" id="{248e4e8a-b308-c741-9a44-fa07bb830ca0}">
+        <p14:section name="Labb 1.2 Granska ett påstående" id="{d58d9d38-0fc9-1861-ca7e-78ac6ece3c6c}">
           <p14:sldIdLst>
             <p14:sldId id="275"/>
             <p14:sldId id="276"/>
@@ -3583,7 +3583,7 @@
                   <a:schemeClr val="bg2"/>
                 </a:solidFill>
               </a:rPr>
-              <a:t>Lektion 1.2.1 Vad kan vetenskap pröva? · 1.2.2 När forskare ändrat sig · 1.2.3 Söka information och bedöma källor · Labb 1.2 Granska ett påstående</a:t>
+              <a:t>Lektion Vad kan vetenskap pröva? · När forskare ändrat sig · Söka information och bedöma källor · Labb 1.2 Granska ett påstående</a:t>
             </a:r>
             <a:endParaRPr lang="en-US" sz="1600" dirty="0"/>
           </a:p>
@@ -4732,7 +4732,7 @@
                   <a:schemeClr val="tx2"/>
                 </a:solidFill>
               </a:rPr>
-              <a:t>Kolla dig själv: 1.2.2</a:t>
+              <a:t>Kolla dig själv</a:t>
             </a:r>
             <a:endParaRPr lang="en-US" sz="3600" dirty="0"/>
           </a:p>
@@ -5001,7 +5001,7 @@
                   <a:schemeClr val="bg1"/>
                 </a:solidFill>
               </a:rPr>
-              <a:t>1.2.3 Söka information och bedöma källor</a:t>
+              <a:t>Söka information och bedöma källor</a:t>
             </a:r>
             <a:endParaRPr lang="en-US" sz="4400" dirty="0"/>
           </a:p>
@@ -8321,7 +8321,7 @@
                   <a:schemeClr val="tx2"/>
                 </a:solidFill>
               </a:rPr>
-              <a:t>Kolla dig själv: 1.2.3</a:t>
+              <a:t>Kolla dig själv</a:t>
             </a:r>
             <a:endParaRPr lang="en-US" sz="3600" dirty="0"/>
           </a:p>
@@ -8590,7 +8590,7 @@
                   <a:schemeClr val="bg1"/>
                 </a:solidFill>
               </a:rPr>
-              <a:t>1.2.1 Vad kan vetenskap pröva?</a:t>
+              <a:t>Vad kan vetenskap pröva?</a:t>
             </a:r>
             <a:endParaRPr lang="en-US" sz="4400" dirty="0"/>
           </a:p>
@@ -13283,7 +13283,7 @@
                   <a:schemeClr val="tx2"/>
                 </a:solidFill>
               </a:rPr>
-              <a:t>Kolla dig själv: 1.2.1</a:t>
+              <a:t>Kolla dig själv</a:t>
             </a:r>
             <a:endParaRPr lang="en-US" sz="3600" dirty="0"/>
           </a:p>
@@ -13533,7 +13533,7 @@
                   <a:schemeClr val="bg1"/>
                 </a:solidFill>
               </a:rPr>
-              <a:t>1.2.2 När forskare ändrat sig</a:t>
+              <a:t>När forskare ändrat sig</a:t>
             </a:r>
             <a:endParaRPr lang="en-US" sz="4400" dirty="0"/>
           </a:p>

--- a/planering/biologi-omrade1/biologi-1-2-modeller-kallor-argument.pptx
+++ b/planering/biologi-omrade1/biologi-1-2-modeller-kallor-argument.pptx
@@ -128,12 +128,12 @@
   <p:extLst>
     <p:ext uri="{521415D9-36F7-43E2-AB2F-B90AF26B5E84}">
       <p14:sectionLst xmlns:p14="http://schemas.microsoft.com/office/powerpoint/2010/main">
-        <p14:section name="Start" id="{6ee7b044-06f8-8fea-28aa-c2787d0c1af9}">
+        <p14:section name="Start" id="{1bd435b8-05e5-894c-ea65-1c2d40baf4c1}">
           <p14:sldIdLst>
             <p14:sldId id="256"/>
           </p14:sldIdLst>
         </p14:section>
-        <p14:section name="Vad kan vetenskap pröva?" id="{3624544a-cbfe-3465-bfce-299514aa2ddc}">
+        <p14:section name="Vad kan vetenskap pröva?" id="{dfc8f173-56ed-5791-48cf-84272bab94d4}">
           <p14:sldIdLst>
             <p14:sldId id="257"/>
             <p14:sldId id="258"/>
@@ -143,7 +143,7 @@
             <p14:sldId id="262"/>
           </p14:sldIdLst>
         </p14:section>
-        <p14:section name="När forskare ändrat sig" id="{2d558e4a-670c-fd57-290b-29b4b6845477}">
+        <p14:section name="När forskare ändrat sig" id="{b16d1ebb-d657-bc61-dbad-1e361a1a5096}">
           <p14:sldIdLst>
             <p14:sldId id="263"/>
             <p14:sldId id="264"/>
@@ -153,7 +153,7 @@
             <p14:sldId id="268"/>
           </p14:sldIdLst>
         </p14:section>
-        <p14:section name="Söka information och bedöma källor" id="{049a04fe-77ad-9ed9-a99f-643cef47dc18}">
+        <p14:section name="Söka information och bedöma källor" id="{c3b79c51-a550-89f2-02fc-4b230ae024bc}">
           <p14:sldIdLst>
             <p14:sldId id="269"/>
             <p14:sldId id="270"/>
@@ -163,7 +163,7 @@
             <p14:sldId id="274"/>
           </p14:sldIdLst>
         </p14:section>
-        <p14:section name="Labb 1.2 Granska ett påstående" id="{d58d9d38-0fc9-1861-ca7e-78ac6ece3c6c}">
+        <p14:section name="Labb 1.2 Granska ett påstående" id="{f1ea0494-1756-f577-79ad-5f291428cc10}">
           <p14:sldIdLst>
             <p14:sldId id="275"/>
             <p14:sldId id="276"/>
@@ -1329,7 +1329,7 @@
           <a:p>
             <a:r>
               <a:rPr lang="en-US" dirty="0"/>
-              <a:t>Ca 50 min.</a:t>
+              <a:t/>
             </a:r>
             <a:endParaRPr lang="en-US" dirty="0"/>
           </a:p>
@@ -1857,7 +1857,7 @@
           <a:p>
             <a:r>
               <a:rPr lang="en-US" dirty="0"/>
-              <a:t>Ca 50 min. Starta med: vad är skillnaden på att veta och att tycka?</a:t>
+              <a:t>Starta med: vad är skillnaden på att veta och att tycka?</a:t>
             </a:r>
             <a:endParaRPr lang="en-US" dirty="0"/>
           </a:p>
@@ -2649,7 +2649,7 @@
           <a:p>
             <a:r>
               <a:rPr lang="en-US" dirty="0"/>
-              <a:t>Ca 50 min. Modell = förenkling av verkligheten.</a:t>
+              <a:t>Modell = förenkling av verkligheten.</a:t>
             </a:r>
             <a:endParaRPr lang="en-US" dirty="0"/>
           </a:p>
@@ -4971,7 +4971,7 @@
       </p:grpSpPr>
       <p:sp>
         <p:nvSpPr>
-          <p:cNvPr id="3" name="Text 0"/>
+          <p:cNvPr id="2" name="Text 0"/>
           <p:cNvSpPr/>
           <p:nvPr>
             <p:ph idx="100" type="title" hasCustomPrompt="1"/>
@@ -5009,7 +5009,7 @@
       </p:sp>
       <p:sp>
         <p:nvSpPr>
-          <p:cNvPr id="4" name="Text 0"/>
+          <p:cNvPr id="3" name="Text 0"/>
           <p:cNvSpPr/>
           <p:nvPr>
             <p:ph idx="101" type="body" hasCustomPrompt="1"/>
@@ -8729,7 +8729,7 @@
                   <a:schemeClr val="bg2"/>
                 </a:solidFill>
               </a:rPr>
-              <a:t>Ca 45 min: granska ett påstående med två källor</a:t>
+              <a:t>Granska ett påstående med två källor</a:t>
             </a:r>
             <a:endParaRPr lang="en-US" sz="2200" dirty="0"/>
           </a:p>
